--- a/material/2_Python/15_예외처리.pptx
+++ b/material/2_Python/15_예외처리.pptx
@@ -5,7 +5,7 @@
     <p:sldMasterId id="2147483660" r:id="rId1"/>
   </p:sldMasterIdLst>
   <p:notesMasterIdLst>
-    <p:notesMasterId r:id="rId18"/>
+    <p:notesMasterId r:id="rId20"/>
   </p:notesMasterIdLst>
   <p:sldIdLst>
     <p:sldId id="1048" r:id="rId2"/>
@@ -23,40 +23,42 @@
     <p:sldId id="1271" r:id="rId14"/>
     <p:sldId id="1272" r:id="rId15"/>
     <p:sldId id="698" r:id="rId16"/>
-    <p:sldId id="813" r:id="rId17"/>
+    <p:sldId id="1273" r:id="rId17"/>
+    <p:sldId id="1274" r:id="rId18"/>
+    <p:sldId id="813" r:id="rId19"/>
   </p:sldIdLst>
   <p:sldSz cx="12192000" cy="6858000"/>
   <p:notesSz cx="6858000" cy="9144000"/>
   <p:embeddedFontLst>
     <p:embeddedFont>
-      <p:font typeface="Kim jung chul Gothic Regular" panose="020B0503000000000000" pitchFamily="50" charset="-127"/>
-      <p:regular r:id="rId19"/>
+      <p:font typeface="Kim jung chul Gothic Regular" panose="020B0600000101010101" charset="-127"/>
+      <p:regular r:id="rId21"/>
+    </p:embeddedFont>
+    <p:embeddedFont>
+      <p:font typeface="메이플스토리" panose="020B0600000101010101" charset="-127"/>
+      <p:regular r:id="rId22"/>
+      <p:bold r:id="rId23"/>
     </p:embeddedFont>
     <p:embeddedFont>
       <p:font typeface="G마켓 산스 TTF Bold" panose="02000000000000000000" pitchFamily="2" charset="-127"/>
-      <p:bold r:id="rId20"/>
+      <p:bold r:id="rId24"/>
     </p:embeddedFont>
     <p:embeddedFont>
-      <p:font typeface="Pretendard Black" panose="02000A03000000020004" pitchFamily="2" charset="-127"/>
-      <p:bold r:id="rId21"/>
+      <p:font typeface="Pretendard Black" panose="02000A03000000020004" pitchFamily="50" charset="-127"/>
+      <p:bold r:id="rId25"/>
     </p:embeddedFont>
     <p:embeddedFont>
-      <p:font typeface="Pretendard Light" panose="02000403000000020004" pitchFamily="2" charset="-127"/>
-      <p:regular r:id="rId22"/>
+      <p:font typeface="Pretendard Light" panose="02000403000000020004" pitchFamily="50" charset="-127"/>
+      <p:regular r:id="rId26"/>
     </p:embeddedFont>
     <p:embeddedFont>
-      <p:font typeface="Pretendard Medium" panose="02000603000000020004" pitchFamily="2" charset="-127"/>
-      <p:regular r:id="rId23"/>
+      <p:font typeface="Pretendard Medium" panose="02000603000000020004" pitchFamily="50" charset="-127"/>
+      <p:regular r:id="rId27"/>
     </p:embeddedFont>
     <p:embeddedFont>
       <p:font typeface="맑은 고딕" panose="020B0503020000020004" pitchFamily="50" charset="-127"/>
-      <p:regular r:id="rId24"/>
-      <p:bold r:id="rId25"/>
-    </p:embeddedFont>
-    <p:embeddedFont>
-      <p:font typeface="메이플스토리" panose="02000300000000000000" pitchFamily="2" charset="-127"/>
-      <p:regular r:id="rId26"/>
-      <p:bold r:id="rId27"/>
+      <p:regular r:id="rId28"/>
+      <p:bold r:id="rId29"/>
     </p:embeddedFont>
   </p:embeddedFontLst>
   <p:defaultTextStyle>
@@ -265,7 +267,7 @@
             <a:fld id="{A13A867C-D490-40C2-AB8D-A60FA70A9BF5}" type="datetimeFigureOut">
               <a:rPr lang="ko-KR" altLang="en-US" smtClean="0"/>
               <a:pPr/>
-              <a:t>2025-09-01</a:t>
+              <a:t>2025-11-28</a:t>
             </a:fld>
             <a:endParaRPr lang="ko-KR" altLang="en-US" dirty="0"/>
           </a:p>
@@ -814,7 +816,7 @@
           <a:p>
             <a:fld id="{A0085365-8376-4996-BDD6-F39608FADAF3}" type="slidenum">
               <a:rPr lang="ko-KR" altLang="en-US" smtClean="0"/>
-              <a:t>16</a:t>
+              <a:t>18</a:t>
             </a:fld>
             <a:endParaRPr lang="ko-KR" altLang="en-US"/>
           </a:p>
@@ -980,7 +982,7 @@
           <a:p>
             <a:fld id="{442BEE3F-2E9A-4FD8-8B8A-8619F3E161C0}" type="datetime1">
               <a:rPr lang="ko-KR" altLang="en-US" smtClean="0"/>
-              <a:t>2025-09-01</a:t>
+              <a:t>2025-11-28</a:t>
             </a:fld>
             <a:endParaRPr lang="ko-KR" altLang="en-US"/>
           </a:p>
@@ -1267,7 +1269,7 @@
           <a:p>
             <a:fld id="{0F78D9C4-20C1-4B15-A116-16DC77AD9A1E}" type="datetime1">
               <a:rPr lang="ko-KR" altLang="en-US" smtClean="0"/>
-              <a:t>2025-09-01</a:t>
+              <a:t>2025-11-28</a:t>
             </a:fld>
             <a:endParaRPr lang="ko-KR" altLang="en-US"/>
           </a:p>
@@ -1442,7 +1444,7 @@
           <a:p>
             <a:fld id="{7F5E23C3-0E3D-4E4E-8486-D7FB4C073DC1}" type="datetime1">
               <a:rPr lang="ko-KR" altLang="en-US" smtClean="0"/>
-              <a:t>2025-09-01</a:t>
+              <a:t>2025-11-28</a:t>
             </a:fld>
             <a:endParaRPr lang="ko-KR" altLang="en-US"/>
           </a:p>
@@ -1854,7 +1856,7 @@
           <a:p>
             <a:fld id="{051A8C49-CED7-4A86-9B4A-621D7F62EE92}" type="datetime1">
               <a:rPr lang="ko-KR" altLang="en-US" smtClean="0"/>
-              <a:t>2025-09-01</a:t>
+              <a:t>2025-11-28</a:t>
             </a:fld>
             <a:endParaRPr lang="ko-KR" altLang="en-US"/>
           </a:p>
@@ -2183,7 +2185,7 @@
           <a:p>
             <a:fld id="{7F5E23C3-0E3D-4E4E-8486-D7FB4C073DC1}" type="datetime1">
               <a:rPr lang="ko-KR" altLang="en-US" smtClean="0"/>
-              <a:t>2025-09-01</a:t>
+              <a:t>2025-11-28</a:t>
             </a:fld>
             <a:endParaRPr lang="ko-KR" altLang="en-US"/>
           </a:p>
@@ -3226,7 +3228,7 @@
           <a:p>
             <a:fld id="{0F78D9C4-20C1-4B15-A116-16DC77AD9A1E}" type="datetime1">
               <a:rPr lang="ko-KR" altLang="en-US" smtClean="0"/>
-              <a:t>2025-09-01</a:t>
+              <a:t>2025-11-28</a:t>
             </a:fld>
             <a:endParaRPr lang="ko-KR" altLang="en-US"/>
           </a:p>
@@ -3481,7 +3483,7 @@
           <a:p>
             <a:fld id="{0F78D9C4-20C1-4B15-A116-16DC77AD9A1E}" type="datetime1">
               <a:rPr lang="ko-KR" altLang="en-US" smtClean="0"/>
-              <a:t>2025-09-01</a:t>
+              <a:t>2025-11-28</a:t>
             </a:fld>
             <a:endParaRPr lang="ko-KR" altLang="en-US"/>
           </a:p>
@@ -3783,7 +3785,7 @@
           <a:p>
             <a:fld id="{0F78D9C4-20C1-4B15-A116-16DC77AD9A1E}" type="datetime1">
               <a:rPr lang="ko-KR" altLang="en-US" smtClean="0"/>
-              <a:t>2025-09-01</a:t>
+              <a:t>2025-11-28</a:t>
             </a:fld>
             <a:endParaRPr lang="ko-KR" altLang="en-US"/>
           </a:p>
@@ -4038,7 +4040,7 @@
           <a:p>
             <a:fld id="{0F78D9C4-20C1-4B15-A116-16DC77AD9A1E}" type="datetime1">
               <a:rPr lang="ko-KR" altLang="en-US" smtClean="0"/>
-              <a:t>2025-09-01</a:t>
+              <a:t>2025-11-28</a:t>
             </a:fld>
             <a:endParaRPr lang="ko-KR" altLang="en-US"/>
           </a:p>
@@ -4325,7 +4327,7 @@
           <a:p>
             <a:fld id="{0F78D9C4-20C1-4B15-A116-16DC77AD9A1E}" type="datetime1">
               <a:rPr lang="ko-KR" altLang="en-US" smtClean="0"/>
-              <a:t>2025-09-01</a:t>
+              <a:t>2025-11-28</a:t>
             </a:fld>
             <a:endParaRPr lang="ko-KR" altLang="en-US"/>
           </a:p>
@@ -4747,13 +4749,8 @@
             </a:r>
             <a:r>
               <a:rPr lang="en-US" altLang="ko-KR" dirty="0"/>
-              <a:t>raise ~ </a:t>
-            </a:r>
-            <a:r>
-              <a:rPr lang="en-US" altLang="ko-KR" dirty="0" err="1"/>
-              <a:t>Exaception</a:t>
-            </a:r>
-            <a:endParaRPr lang="en-US" altLang="ko-KR" dirty="0"/>
+              <a:t>raise ~ Exception</a:t>
+            </a:r>
           </a:p>
         </p:txBody>
       </p:sp>
@@ -4857,6 +4854,575 @@
 </file>
 
 <file path=ppt/slides/slide16.xml><?xml version="1.0" encoding="utf-8"?>
+<p:sld xmlns:a="http://schemas.openxmlformats.org/drawingml/2006/main" xmlns:r="http://schemas.openxmlformats.org/officeDocument/2006/relationships" xmlns:p="http://schemas.openxmlformats.org/presentationml/2006/main">
+  <p:cSld>
+    <p:spTree>
+      <p:nvGrpSpPr>
+        <p:cNvPr id="1" name=""/>
+        <p:cNvGrpSpPr/>
+        <p:nvPr/>
+      </p:nvGrpSpPr>
+      <p:grpSpPr>
+        <a:xfrm>
+          <a:off x="0" y="0"/>
+          <a:ext cx="0" cy="0"/>
+          <a:chOff x="0" y="0"/>
+          <a:chExt cx="0" cy="0"/>
+        </a:xfrm>
+      </p:grpSpPr>
+      <p:sp>
+        <p:nvSpPr>
+          <p:cNvPr id="2" name="제목 1">
+            <a:extLst>
+              <a:ext uri="{FF2B5EF4-FFF2-40B4-BE49-F238E27FC236}">
+                <a16:creationId xmlns:a16="http://schemas.microsoft.com/office/drawing/2014/main" id="{65937AF6-3951-8884-B239-0CD943EC6C55}"/>
+              </a:ext>
+            </a:extLst>
+          </p:cNvPr>
+          <p:cNvSpPr>
+            <a:spLocks noGrp="1"/>
+          </p:cNvSpPr>
+          <p:nvPr>
+            <p:ph type="title"/>
+          </p:nvPr>
+        </p:nvSpPr>
+        <p:spPr/>
+        <p:txBody>
+          <a:bodyPr/>
+          <a:lstStyle/>
+          <a:p>
+            <a:r>
+              <a:rPr lang="ko-KR" altLang="en-US" dirty="0">
+                <a:solidFill>
+                  <a:schemeClr val="accent2"/>
+                </a:solidFill>
+              </a:rPr>
+              <a:t>실습 </a:t>
+            </a:r>
+            <a:r>
+              <a:rPr lang="en-US" altLang="ko-KR" dirty="0">
+                <a:solidFill>
+                  <a:schemeClr val="accent2"/>
+                </a:solidFill>
+              </a:rPr>
+              <a:t>1</a:t>
+            </a:r>
+            <a:r>
+              <a:rPr lang="ko-KR" altLang="en-US" dirty="0">
+                <a:solidFill>
+                  <a:schemeClr val="accent2"/>
+                </a:solidFill>
+              </a:rPr>
+              <a:t>번</a:t>
+            </a:r>
+          </a:p>
+        </p:txBody>
+      </p:sp>
+      <p:sp>
+        <p:nvSpPr>
+          <p:cNvPr id="6" name="내용 개체 틀 5">
+            <a:extLst>
+              <a:ext uri="{FF2B5EF4-FFF2-40B4-BE49-F238E27FC236}">
+                <a16:creationId xmlns:a16="http://schemas.microsoft.com/office/drawing/2014/main" id="{E0861275-880B-62C7-8466-F5C4F4CC543C}"/>
+              </a:ext>
+            </a:extLst>
+          </p:cNvPr>
+          <p:cNvSpPr>
+            <a:spLocks noGrp="1"/>
+          </p:cNvSpPr>
+          <p:nvPr>
+            <p:ph idx="1"/>
+          </p:nvPr>
+        </p:nvSpPr>
+        <p:spPr/>
+        <p:txBody>
+          <a:bodyPr/>
+          <a:lstStyle/>
+          <a:p>
+            <a:pPr marL="342900" indent="-342900">
+              <a:buFont typeface="Arial" panose="020B0604020202020204" pitchFamily="34" charset="0"/>
+              <a:buChar char="•"/>
+            </a:pPr>
+            <a:r>
+              <a:rPr lang="ko-KR" altLang="en-US" dirty="0"/>
+              <a:t>조건 </a:t>
+            </a:r>
+            <a:r>
+              <a:rPr lang="en-US" altLang="ko-KR" dirty="0"/>
+              <a:t>1. </a:t>
+            </a:r>
+            <a:r>
+              <a:rPr lang="ko-KR" altLang="en-US" dirty="0"/>
+              <a:t>사용자에게 숫자를 입력 받고</a:t>
+            </a:r>
+            <a:r>
+              <a:rPr lang="en-US" altLang="ko-KR" dirty="0"/>
+              <a:t>, try </a:t>
+            </a:r>
+            <a:r>
+              <a:rPr lang="ko-KR" altLang="en-US" dirty="0"/>
+              <a:t>안에서 </a:t>
+            </a:r>
+            <a:r>
+              <a:rPr lang="en-US" altLang="ko-KR" dirty="0"/>
+              <a:t>int() </a:t>
+            </a:r>
+            <a:r>
+              <a:rPr lang="ko-KR" altLang="en-US" dirty="0"/>
+              <a:t>함수를 사용해 숫자로 변환해 </a:t>
+            </a:r>
+            <a:r>
+              <a:rPr lang="en-US" altLang="ko-KR" dirty="0"/>
+              <a:t>num </a:t>
+            </a:r>
+            <a:r>
+              <a:rPr lang="ko-KR" altLang="en-US" dirty="0"/>
+              <a:t>변수에 저장해 주세요</a:t>
+            </a:r>
+            <a:r>
+              <a:rPr lang="en-US" altLang="ko-KR" dirty="0"/>
+              <a:t>.</a:t>
+            </a:r>
+          </a:p>
+          <a:p>
+            <a:pPr marL="342900" indent="-342900">
+              <a:buFont typeface="Arial" panose="020B0604020202020204" pitchFamily="34" charset="0"/>
+              <a:buChar char="•"/>
+            </a:pPr>
+            <a:r>
+              <a:rPr lang="ko-KR" altLang="en-US" dirty="0"/>
+              <a:t>조건 </a:t>
+            </a:r>
+            <a:r>
+              <a:rPr lang="en-US" altLang="ko-KR" dirty="0"/>
+              <a:t>2. </a:t>
+            </a:r>
+            <a:r>
+              <a:rPr lang="ko-KR" altLang="en-US" dirty="0"/>
+              <a:t>입력 받은 값이 숫자가 아니라면 에러가 발생할 거예요</a:t>
+            </a:r>
+            <a:r>
+              <a:rPr lang="en-US" altLang="ko-KR" dirty="0"/>
+              <a:t>.</a:t>
+            </a:r>
+          </a:p>
+          <a:p>
+            <a:pPr marL="342900" indent="-342900">
+              <a:buFont typeface="Arial" panose="020B0604020202020204" pitchFamily="34" charset="0"/>
+              <a:buChar char="•"/>
+            </a:pPr>
+            <a:r>
+              <a:rPr lang="ko-KR" altLang="en-US" dirty="0"/>
+              <a:t>조건 </a:t>
+            </a:r>
+            <a:r>
+              <a:rPr lang="en-US" altLang="ko-KR" dirty="0"/>
+              <a:t>3. </a:t>
+            </a:r>
+            <a:r>
+              <a:rPr lang="ko-KR" altLang="en-US" dirty="0"/>
+              <a:t>예외상황 발생 시 변수 </a:t>
+            </a:r>
+            <a:r>
+              <a:rPr lang="en-US" altLang="ko-KR" dirty="0"/>
+              <a:t>num</a:t>
+            </a:r>
+            <a:r>
+              <a:rPr lang="ko-KR" altLang="en-US" dirty="0"/>
+              <a:t>은 </a:t>
+            </a:r>
+            <a:r>
+              <a:rPr lang="en-US" altLang="ko-KR" dirty="0"/>
+              <a:t>-1</a:t>
+            </a:r>
+            <a:r>
+              <a:rPr lang="ko-KR" altLang="en-US" dirty="0"/>
+              <a:t>로 저장해 주세요</a:t>
+            </a:r>
+            <a:r>
+              <a:rPr lang="en-US" altLang="ko-KR" dirty="0"/>
+              <a:t>.</a:t>
+            </a:r>
+          </a:p>
+          <a:p>
+            <a:pPr marL="342900" indent="-342900">
+              <a:buFont typeface="Arial" panose="020B0604020202020204" pitchFamily="34" charset="0"/>
+              <a:buChar char="•"/>
+            </a:pPr>
+            <a:r>
+              <a:rPr lang="ko-KR" altLang="en-US" dirty="0"/>
+              <a:t>조건 </a:t>
+            </a:r>
+            <a:r>
+              <a:rPr lang="en-US" altLang="ko-KR" dirty="0"/>
+              <a:t>4. if, else</a:t>
+            </a:r>
+            <a:r>
+              <a:rPr lang="ko-KR" altLang="en-US" dirty="0"/>
+              <a:t>문을 사용해서 </a:t>
+            </a:r>
+            <a:r>
+              <a:rPr lang="en-US" altLang="ko-KR" dirty="0"/>
+              <a:t>num</a:t>
+            </a:r>
+            <a:r>
+              <a:rPr lang="ko-KR" altLang="en-US" dirty="0"/>
+              <a:t>이 </a:t>
+            </a:r>
+            <a:r>
+              <a:rPr lang="en-US" altLang="ko-KR" dirty="0"/>
+              <a:t>0</a:t>
+            </a:r>
+            <a:r>
+              <a:rPr lang="ko-KR" altLang="en-US" dirty="0"/>
+              <a:t>보다 크면 </a:t>
+            </a:r>
+            <a:r>
+              <a:rPr lang="en-US" altLang="ko-KR" dirty="0"/>
+              <a:t>"0</a:t>
+            </a:r>
+            <a:r>
+              <a:rPr lang="ko-KR" altLang="en-US" dirty="0"/>
+              <a:t>보다 큽니다</a:t>
+            </a:r>
+            <a:r>
+              <a:rPr lang="en-US" altLang="ko-KR" dirty="0"/>
+              <a:t>"</a:t>
+            </a:r>
+            <a:r>
+              <a:rPr lang="ko-KR" altLang="en-US" dirty="0"/>
+              <a:t>를</a:t>
+            </a:r>
+            <a:r>
+              <a:rPr lang="en-US" altLang="ko-KR" dirty="0"/>
+              <a:t>, </a:t>
+            </a:r>
+            <a:r>
+              <a:rPr lang="ko-KR" altLang="en-US" dirty="0"/>
+              <a:t>아니라면 </a:t>
+            </a:r>
+            <a:r>
+              <a:rPr lang="en-US" altLang="ko-KR" dirty="0"/>
+              <a:t>"</a:t>
+            </a:r>
+            <a:r>
+              <a:rPr lang="ko-KR" altLang="en-US" dirty="0"/>
+              <a:t>숫자가 아닙니다</a:t>
+            </a:r>
+            <a:r>
+              <a:rPr lang="en-US" altLang="ko-KR" dirty="0"/>
+              <a:t>"</a:t>
+            </a:r>
+            <a:r>
+              <a:rPr lang="ko-KR" altLang="en-US" dirty="0"/>
+              <a:t>를 출력해 주세요</a:t>
+            </a:r>
+            <a:r>
+              <a:rPr lang="en-US" altLang="ko-KR" dirty="0"/>
+              <a:t>.</a:t>
+            </a:r>
+          </a:p>
+          <a:p>
+            <a:endParaRPr lang="ko-KR" altLang="en-US" dirty="0"/>
+          </a:p>
+        </p:txBody>
+      </p:sp>
+    </p:spTree>
+    <p:extLst>
+      <p:ext uri="{BB962C8B-B14F-4D97-AF65-F5344CB8AC3E}">
+        <p14:creationId xmlns:p14="http://schemas.microsoft.com/office/powerpoint/2010/main" val="1859585684"/>
+      </p:ext>
+    </p:extLst>
+  </p:cSld>
+  <p:clrMapOvr>
+    <a:masterClrMapping/>
+  </p:clrMapOvr>
+</p:sld>
+</file>
+
+<file path=ppt/slides/slide17.xml><?xml version="1.0" encoding="utf-8"?>
+<p:sld xmlns:a="http://schemas.openxmlformats.org/drawingml/2006/main" xmlns:r="http://schemas.openxmlformats.org/officeDocument/2006/relationships" xmlns:p="http://schemas.openxmlformats.org/presentationml/2006/main">
+  <p:cSld>
+    <p:spTree>
+      <p:nvGrpSpPr>
+        <p:cNvPr id="1" name=""/>
+        <p:cNvGrpSpPr/>
+        <p:nvPr/>
+      </p:nvGrpSpPr>
+      <p:grpSpPr>
+        <a:xfrm>
+          <a:off x="0" y="0"/>
+          <a:ext cx="0" cy="0"/>
+          <a:chOff x="0" y="0"/>
+          <a:chExt cx="0" cy="0"/>
+        </a:xfrm>
+      </p:grpSpPr>
+      <p:sp>
+        <p:nvSpPr>
+          <p:cNvPr id="2" name="제목 1">
+            <a:extLst>
+              <a:ext uri="{FF2B5EF4-FFF2-40B4-BE49-F238E27FC236}">
+                <a16:creationId xmlns:a16="http://schemas.microsoft.com/office/drawing/2014/main" id="{7DF0F7D4-66A2-9805-3AA8-D4BCB6951947}"/>
+              </a:ext>
+            </a:extLst>
+          </p:cNvPr>
+          <p:cNvSpPr>
+            <a:spLocks noGrp="1"/>
+          </p:cNvSpPr>
+          <p:nvPr>
+            <p:ph type="title"/>
+          </p:nvPr>
+        </p:nvSpPr>
+        <p:spPr/>
+        <p:txBody>
+          <a:bodyPr/>
+          <a:lstStyle/>
+          <a:p>
+            <a:r>
+              <a:rPr lang="ko-KR" altLang="en-US" dirty="0">
+                <a:solidFill>
+                  <a:schemeClr val="accent2"/>
+                </a:solidFill>
+              </a:rPr>
+              <a:t>실습 </a:t>
+            </a:r>
+            <a:r>
+              <a:rPr lang="en-US" altLang="ko-KR" dirty="0">
+                <a:solidFill>
+                  <a:schemeClr val="accent2"/>
+                </a:solidFill>
+              </a:rPr>
+              <a:t>2</a:t>
+            </a:r>
+            <a:r>
+              <a:rPr lang="ko-KR" altLang="en-US" dirty="0">
+                <a:solidFill>
+                  <a:schemeClr val="accent2"/>
+                </a:solidFill>
+              </a:rPr>
+              <a:t>번</a:t>
+            </a:r>
+          </a:p>
+        </p:txBody>
+      </p:sp>
+      <p:sp>
+        <p:nvSpPr>
+          <p:cNvPr id="3" name="내용 개체 틀 2">
+            <a:extLst>
+              <a:ext uri="{FF2B5EF4-FFF2-40B4-BE49-F238E27FC236}">
+                <a16:creationId xmlns:a16="http://schemas.microsoft.com/office/drawing/2014/main" id="{A68CE63D-ECED-B325-C837-6F40EAFB3CA8}"/>
+              </a:ext>
+            </a:extLst>
+          </p:cNvPr>
+          <p:cNvSpPr>
+            <a:spLocks noGrp="1"/>
+          </p:cNvSpPr>
+          <p:nvPr>
+            <p:ph idx="1"/>
+          </p:nvPr>
+        </p:nvSpPr>
+        <p:spPr/>
+        <p:txBody>
+          <a:bodyPr>
+            <a:normAutofit fontScale="92500"/>
+          </a:bodyPr>
+          <a:lstStyle/>
+          <a:p>
+            <a:r>
+              <a:rPr lang="ko-KR" altLang="en-US" dirty="0"/>
+              <a:t>앞에서 배웠던 내용들을 사용하여 사칙연산 계산기 프로그램을 만들어봅시다</a:t>
+            </a:r>
+            <a:r>
+              <a:rPr lang="en-US" altLang="ko-KR" dirty="0"/>
+              <a:t>.</a:t>
+            </a:r>
+          </a:p>
+          <a:p>
+            <a:r>
+              <a:rPr lang="ko-KR" altLang="en-US" dirty="0"/>
+              <a:t>숫자 </a:t>
+            </a:r>
+            <a:r>
+              <a:rPr lang="en-US" altLang="ko-KR" dirty="0"/>
+              <a:t>2</a:t>
+            </a:r>
+            <a:r>
+              <a:rPr lang="ko-KR" altLang="en-US" dirty="0"/>
+              <a:t>개</a:t>
+            </a:r>
+            <a:r>
+              <a:rPr lang="en-US" altLang="ko-KR" dirty="0"/>
+              <a:t>, </a:t>
+            </a:r>
+            <a:r>
+              <a:rPr lang="ko-KR" altLang="en-US" dirty="0"/>
+              <a:t>연산자 </a:t>
+            </a:r>
+            <a:r>
+              <a:rPr lang="en-US" altLang="ko-KR" dirty="0"/>
+              <a:t>1</a:t>
+            </a:r>
+            <a:r>
+              <a:rPr lang="ko-KR" altLang="en-US" dirty="0"/>
+              <a:t>개를 받을 </a:t>
+            </a:r>
+            <a:r>
+              <a:rPr lang="ko-KR" altLang="en-US" b="1" dirty="0"/>
+              <a:t>변수</a:t>
+            </a:r>
+            <a:r>
+              <a:rPr lang="ko-KR" altLang="en-US" dirty="0"/>
+              <a:t>를 만들어줍니다</a:t>
+            </a:r>
+            <a:r>
+              <a:rPr lang="en-US" altLang="ko-KR" dirty="0"/>
+              <a:t>.</a:t>
+            </a:r>
+          </a:p>
+          <a:p>
+            <a:r>
+              <a:rPr lang="ko-KR" altLang="en-US" b="1" dirty="0"/>
+              <a:t>연산자</a:t>
+            </a:r>
+            <a:r>
+              <a:rPr lang="ko-KR" altLang="en-US" dirty="0"/>
+              <a:t>는 “</a:t>
+            </a:r>
+            <a:r>
+              <a:rPr lang="en-US" altLang="ko-KR" dirty="0"/>
+              <a:t>+-*/”</a:t>
+            </a:r>
+            <a:r>
+              <a:rPr lang="ko-KR" altLang="en-US" dirty="0"/>
+              <a:t>로 입력 받을 수 있습니다</a:t>
+            </a:r>
+            <a:r>
+              <a:rPr lang="en-US" altLang="ko-KR" dirty="0"/>
+              <a:t>.</a:t>
+            </a:r>
+          </a:p>
+          <a:p>
+            <a:pPr lvl="1"/>
+            <a:r>
+              <a:rPr lang="ko-KR" altLang="en-US" dirty="0"/>
+              <a:t>숫자가 아닌 문자를 입력 받았을 때 </a:t>
+            </a:r>
+            <a:r>
+              <a:rPr lang="en-US" altLang="ko-KR" dirty="0"/>
+              <a:t>/ 2. </a:t>
+            </a:r>
+            <a:r>
+              <a:rPr lang="ko-KR" altLang="en-US" dirty="0"/>
+              <a:t>연산자가 아닌 문자를 입력 받았을 때</a:t>
+            </a:r>
+          </a:p>
+          <a:p>
+            <a:r>
+              <a:rPr lang="ko-KR" altLang="en-US" b="1" dirty="0"/>
+              <a:t>예외</a:t>
+            </a:r>
+            <a:r>
+              <a:rPr lang="ko-KR" altLang="en-US" dirty="0"/>
+              <a:t>를 발생시켜줍니다</a:t>
+            </a:r>
+            <a:r>
+              <a:rPr lang="en-US" altLang="ko-KR" dirty="0"/>
+              <a:t>.</a:t>
+            </a:r>
+          </a:p>
+          <a:p>
+            <a:r>
+              <a:rPr lang="ko-KR" altLang="en-US" b="1" dirty="0"/>
+              <a:t>반복문</a:t>
+            </a:r>
+            <a:r>
+              <a:rPr lang="ko-KR" altLang="en-US" dirty="0"/>
+              <a:t>을 사용하여 사용자가 올바른 값을 입력할 때 까지 반복해줍니다</a:t>
+            </a:r>
+            <a:r>
+              <a:rPr lang="en-US" altLang="ko-KR" dirty="0"/>
+              <a:t>.</a:t>
+            </a:r>
+          </a:p>
+          <a:p>
+            <a:r>
+              <a:rPr lang="ko-KR" altLang="en-US" b="1" dirty="0"/>
+              <a:t>조건문</a:t>
+            </a:r>
+            <a:r>
+              <a:rPr lang="ko-KR" altLang="en-US" dirty="0"/>
+              <a:t>을 사용하여 연산자에 따라 연산을 진행해줍니다</a:t>
+            </a:r>
+            <a:r>
+              <a:rPr lang="en-US" altLang="ko-KR" dirty="0"/>
+              <a:t>.</a:t>
+            </a:r>
+          </a:p>
+          <a:p>
+            <a:r>
+              <a:rPr lang="ko-KR" altLang="en-US" dirty="0"/>
+              <a:t>결과값은 </a:t>
+            </a:r>
+            <a:r>
+              <a:rPr lang="ko-KR" altLang="en-US" b="1" dirty="0"/>
+              <a:t>함수</a:t>
+            </a:r>
+            <a:r>
+              <a:rPr lang="ko-KR" altLang="en-US" dirty="0"/>
+              <a:t>를 사용하여 </a:t>
+            </a:r>
+            <a:r>
+              <a:rPr lang="en-US" altLang="ko-KR" dirty="0"/>
+              <a:t>(</a:t>
+            </a:r>
+            <a:r>
+              <a:rPr lang="ko-KR" altLang="en-US" dirty="0"/>
+              <a:t>숫자</a:t>
+            </a:r>
+            <a:r>
+              <a:rPr lang="en-US" altLang="ko-KR" dirty="0"/>
+              <a:t>1</a:t>
+            </a:r>
+            <a:r>
+              <a:rPr lang="ko-KR" altLang="en-US" dirty="0"/>
+              <a:t>　연산자　숫자</a:t>
+            </a:r>
+            <a:r>
+              <a:rPr lang="en-US" altLang="ko-KR" dirty="0"/>
+              <a:t>2= </a:t>
+            </a:r>
+            <a:r>
+              <a:rPr lang="ko-KR" altLang="en-US" dirty="0"/>
+              <a:t>결과값</a:t>
+            </a:r>
+            <a:r>
+              <a:rPr lang="en-US" altLang="ko-KR" dirty="0"/>
+              <a:t>) </a:t>
+            </a:r>
+            <a:r>
+              <a:rPr lang="ko-KR" altLang="en-US" dirty="0"/>
+              <a:t>양식으로 출력해줍니다</a:t>
+            </a:r>
+          </a:p>
+          <a:p>
+            <a:endParaRPr lang="ko-KR" altLang="en-US" dirty="0"/>
+          </a:p>
+        </p:txBody>
+      </p:sp>
+    </p:spTree>
+    <p:extLst>
+      <p:ext uri="{BB962C8B-B14F-4D97-AF65-F5344CB8AC3E}">
+        <p14:creationId xmlns:p14="http://schemas.microsoft.com/office/powerpoint/2010/main" val="4125809619"/>
+      </p:ext>
+    </p:extLst>
+  </p:cSld>
+  <p:clrMapOvr>
+    <a:masterClrMapping/>
+  </p:clrMapOvr>
+</p:sld>
+</file>
+
+<file path=ppt/slides/slide18.xml><?xml version="1.0" encoding="utf-8"?>
 <p:sld xmlns:a="http://schemas.openxmlformats.org/drawingml/2006/main" xmlns:r="http://schemas.openxmlformats.org/officeDocument/2006/relationships" xmlns:p="http://schemas.openxmlformats.org/presentationml/2006/main">
   <p:cSld>
     <p:spTree>
@@ -5128,7 +5694,7 @@
           <a:p>
             <a:fld id="{0F78D9C4-20C1-4B15-A116-16DC77AD9A1E}" type="datetime1">
               <a:rPr lang="ko-KR" altLang="en-US" smtClean="0"/>
-              <a:t>2025-09-01</a:t>
+              <a:t>2025-11-28</a:t>
             </a:fld>
             <a:endParaRPr lang="ko-KR" altLang="en-US"/>
           </a:p>
@@ -5664,7 +6230,7 @@
           <a:p>
             <a:fld id="{0F78D9C4-20C1-4B15-A116-16DC77AD9A1E}" type="datetime1">
               <a:rPr lang="ko-KR" altLang="en-US" smtClean="0"/>
-              <a:t>2025-09-01</a:t>
+              <a:t>2025-11-28</a:t>
             </a:fld>
             <a:endParaRPr lang="ko-KR" altLang="en-US"/>
           </a:p>
@@ -5904,7 +6470,7 @@
           <a:p>
             <a:fld id="{0F78D9C4-20C1-4B15-A116-16DC77AD9A1E}" type="datetime1">
               <a:rPr lang="ko-KR" altLang="en-US" smtClean="0"/>
-              <a:t>2025-09-01</a:t>
+              <a:t>2025-11-28</a:t>
             </a:fld>
             <a:endParaRPr lang="ko-KR" altLang="en-US"/>
           </a:p>
@@ -6021,7 +6587,7 @@
           <a:p>
             <a:fld id="{0F78D9C4-20C1-4B15-A116-16DC77AD9A1E}" type="datetime1">
               <a:rPr lang="ko-KR" altLang="en-US" smtClean="0"/>
-              <a:t>2025-09-01</a:t>
+              <a:t>2025-11-28</a:t>
             </a:fld>
             <a:endParaRPr lang="ko-KR" altLang="en-US"/>
           </a:p>
@@ -6546,7 +7112,7 @@
           <a:p>
             <a:fld id="{0F78D9C4-20C1-4B15-A116-16DC77AD9A1E}" type="datetime1">
               <a:rPr lang="ko-KR" altLang="en-US" smtClean="0"/>
-              <a:t>2025-09-01</a:t>
+              <a:t>2025-11-28</a:t>
             </a:fld>
             <a:endParaRPr lang="ko-KR" altLang="en-US"/>
           </a:p>
@@ -6830,7 +7396,7 @@
           <a:p>
             <a:fld id="{0F78D9C4-20C1-4B15-A116-16DC77AD9A1E}" type="datetime1">
               <a:rPr lang="ko-KR" altLang="en-US" smtClean="0"/>
-              <a:t>2025-09-01</a:t>
+              <a:t>2025-11-28</a:t>
             </a:fld>
             <a:endParaRPr lang="ko-KR" altLang="en-US"/>
           </a:p>
@@ -7101,7 +7667,7 @@
           <a:p>
             <a:fld id="{0F78D9C4-20C1-4B15-A116-16DC77AD9A1E}" type="datetime1">
               <a:rPr lang="ko-KR" altLang="en-US" smtClean="0"/>
-              <a:t>2025-09-01</a:t>
+              <a:t>2025-11-28</a:t>
             </a:fld>
             <a:endParaRPr lang="ko-KR" altLang="en-US"/>
           </a:p>
